--- a/7th Semester/CCE-417_Data Warehousing & Mining/Murad sir/Chi_Square_Test_Real_Examples_19_6_25_with_calculation19_6_25.pptx
+++ b/7th Semester/CCE-417_Data Warehousing & Mining/Murad sir/Chi_Square_Test_Real_Examples_19_6_25_with_calculation19_6_25.pptx
@@ -1,19 +1,19 @@
 
 <file path=ppt/presentation.xml><?xml version="1.0" encoding="utf-8"?>
-<p:presentation xmlns:a="http://schemas.openxmlformats.org/drawingml/2006/main" xmlns:r="http://schemas.openxmlformats.org/officeDocument/2006/relationships" xmlns:p="http://schemas.openxmlformats.org/presentationml/2006/main" autoCompressPictures="0">
+<p:presentation xmlns:a="http://schemas.openxmlformats.org/drawingml/2006/main" xmlns:r="http://schemas.openxmlformats.org/officeDocument/2006/relationships" xmlns:p="http://schemas.openxmlformats.org/presentationml/2006/main" saveSubsetFonts="1" autoCompressPictures="0">
   <p:sldMasterIdLst>
     <p:sldMasterId id="2147483648" r:id="rId1"/>
   </p:sldMasterIdLst>
   <p:sldIdLst>
-    <p:sldId id="256" r:id="rId3"/>
-    <p:sldId id="257" r:id="rId4"/>
-    <p:sldId id="261" r:id="rId5"/>
-    <p:sldId id="258" r:id="rId6"/>
-    <p:sldId id="262" r:id="rId7"/>
-    <p:sldId id="259" r:id="rId8"/>
-    <p:sldId id="263" r:id="rId9"/>
-    <p:sldId id="260" r:id="rId10"/>
-    <p:sldId id="264" r:id="rId11"/>
+    <p:sldId id="256" r:id="rId2"/>
+    <p:sldId id="257" r:id="rId3"/>
+    <p:sldId id="261" r:id="rId4"/>
+    <p:sldId id="258" r:id="rId5"/>
+    <p:sldId id="262" r:id="rId6"/>
+    <p:sldId id="259" r:id="rId7"/>
+    <p:sldId id="263" r:id="rId8"/>
+    <p:sldId id="260" r:id="rId9"/>
+    <p:sldId id="264" r:id="rId10"/>
   </p:sldIdLst>
   <p:sldSz cx="9144000" cy="6858000" type="screen4x3"/>
   <p:notesSz cx="6858000" cy="9144000"/>
@@ -112,22 +112,6 @@
       </a:defRPr>
     </a:lvl9pPr>
   </p:defaultTextStyle>
-  <p:extLst>
-    <p:ext uri="{EFAFB233-063F-42B5-8137-9DF3F51BA10A}">
-      <p15:sldGuideLst xmlns:p15="http://schemas.microsoft.com/office/powerpoint/2012/main">
-        <p15:guide id="1" orient="horz" pos="2160" userDrawn="1">
-          <p15:clr>
-            <a:srgbClr val="A4A3A4"/>
-          </p15:clr>
-        </p15:guide>
-        <p15:guide id="2" pos="2880" userDrawn="1">
-          <p15:clr>
-            <a:srgbClr val="A4A3A4"/>
-          </p15:clr>
-        </p15:guide>
-      </p15:sldGuideLst>
-    </p:ext>
-  </p:extLst>
 </p:presentation>
 </file>
 
@@ -312,6 +296,8 @@
           <a:p>
             <a:fld id="{5BCAD085-E8A6-8845-BD4E-CB4CCA059FC4}" type="datetimeFigureOut">
               <a:rPr lang="en-US" smtClean="0"/>
+              <a:pPr/>
+              <a:t>19-Jun-25</a:t>
             </a:fld>
             <a:endParaRPr lang="en-US"/>
           </a:p>
@@ -353,12 +339,19 @@
           <a:p>
             <a:fld id="{C1FF6DA9-008F-8B48-92A6-B652298478BF}" type="slidenum">
               <a:rPr lang="en-US" smtClean="0"/>
+              <a:pPr/>
+              <a:t>‹#›</a:t>
             </a:fld>
             <a:endParaRPr lang="en-US"/>
           </a:p>
         </p:txBody>
       </p:sp>
     </p:spTree>
+    <p:extLst>
+      <p:ext uri="{BB962C8B-B14F-4D97-AF65-F5344CB8AC3E}">
+        <p14:creationId xmlns:p14="http://schemas.microsoft.com/office/powerpoint/2010/main" xmlns="" val="3168075583"/>
+      </p:ext>
+    </p:extLst>
   </p:cSld>
   <p:clrMapOvr>
     <a:masterClrMapping/>
@@ -426,7 +419,6 @@
               <a:rPr lang="en-US" smtClean="0"/>
               <a:t>Click to edit Master text styles</a:t>
             </a:r>
-            <a:endParaRPr lang="en-US" smtClean="0"/>
           </a:p>
           <a:p>
             <a:pPr lvl="1"/>
@@ -434,7 +426,6 @@
               <a:rPr lang="en-US" smtClean="0"/>
               <a:t>Second level</a:t>
             </a:r>
-            <a:endParaRPr lang="en-US" smtClean="0"/>
           </a:p>
           <a:p>
             <a:pPr lvl="2"/>
@@ -442,7 +433,6 @@
               <a:rPr lang="en-US" smtClean="0"/>
               <a:t>Third level</a:t>
             </a:r>
-            <a:endParaRPr lang="en-US" smtClean="0"/>
           </a:p>
           <a:p>
             <a:pPr lvl="3"/>
@@ -450,7 +440,6 @@
               <a:rPr lang="en-US" smtClean="0"/>
               <a:t>Fourth level</a:t>
             </a:r>
-            <a:endParaRPr lang="en-US" smtClean="0"/>
           </a:p>
           <a:p>
             <a:pPr lvl="4"/>
@@ -479,6 +468,8 @@
           <a:p>
             <a:fld id="{5BCAD085-E8A6-8845-BD4E-CB4CCA059FC4}" type="datetimeFigureOut">
               <a:rPr lang="en-US" smtClean="0"/>
+              <a:pPr/>
+              <a:t>19-Jun-25</a:t>
             </a:fld>
             <a:endParaRPr lang="en-US"/>
           </a:p>
@@ -520,12 +511,19 @@
           <a:p>
             <a:fld id="{C1FF6DA9-008F-8B48-92A6-B652298478BF}" type="slidenum">
               <a:rPr lang="en-US" smtClean="0"/>
+              <a:pPr/>
+              <a:t>‹#›</a:t>
             </a:fld>
             <a:endParaRPr lang="en-US"/>
           </a:p>
         </p:txBody>
       </p:sp>
     </p:spTree>
+    <p:extLst>
+      <p:ext uri="{BB962C8B-B14F-4D97-AF65-F5344CB8AC3E}">
+        <p14:creationId xmlns:p14="http://schemas.microsoft.com/office/powerpoint/2010/main" xmlns="" val="2910927964"/>
+      </p:ext>
+    </p:extLst>
   </p:cSld>
   <p:clrMapOvr>
     <a:masterClrMapping/>
@@ -603,7 +601,6 @@
               <a:rPr lang="en-US" smtClean="0"/>
               <a:t>Click to edit Master text styles</a:t>
             </a:r>
-            <a:endParaRPr lang="en-US" smtClean="0"/>
           </a:p>
           <a:p>
             <a:pPr lvl="1"/>
@@ -611,7 +608,6 @@
               <a:rPr lang="en-US" smtClean="0"/>
               <a:t>Second level</a:t>
             </a:r>
-            <a:endParaRPr lang="en-US" smtClean="0"/>
           </a:p>
           <a:p>
             <a:pPr lvl="2"/>
@@ -619,7 +615,6 @@
               <a:rPr lang="en-US" smtClean="0"/>
               <a:t>Third level</a:t>
             </a:r>
-            <a:endParaRPr lang="en-US" smtClean="0"/>
           </a:p>
           <a:p>
             <a:pPr lvl="3"/>
@@ -627,7 +622,6 @@
               <a:rPr lang="en-US" smtClean="0"/>
               <a:t>Fourth level</a:t>
             </a:r>
-            <a:endParaRPr lang="en-US" smtClean="0"/>
           </a:p>
           <a:p>
             <a:pPr lvl="4"/>
@@ -656,6 +650,8 @@
           <a:p>
             <a:fld id="{5BCAD085-E8A6-8845-BD4E-CB4CCA059FC4}" type="datetimeFigureOut">
               <a:rPr lang="en-US" smtClean="0"/>
+              <a:pPr/>
+              <a:t>19-Jun-25</a:t>
             </a:fld>
             <a:endParaRPr lang="en-US"/>
           </a:p>
@@ -697,12 +693,19 @@
           <a:p>
             <a:fld id="{C1FF6DA9-008F-8B48-92A6-B652298478BF}" type="slidenum">
               <a:rPr lang="en-US" smtClean="0"/>
+              <a:pPr/>
+              <a:t>‹#›</a:t>
             </a:fld>
             <a:endParaRPr lang="en-US"/>
           </a:p>
         </p:txBody>
       </p:sp>
     </p:spTree>
+    <p:extLst>
+      <p:ext uri="{BB962C8B-B14F-4D97-AF65-F5344CB8AC3E}">
+        <p14:creationId xmlns:p14="http://schemas.microsoft.com/office/powerpoint/2010/main" xmlns="" val="3612223792"/>
+      </p:ext>
+    </p:extLst>
   </p:cSld>
   <p:clrMapOvr>
     <a:masterClrMapping/>
@@ -770,7 +773,6 @@
               <a:rPr lang="en-US" smtClean="0"/>
               <a:t>Click to edit Master text styles</a:t>
             </a:r>
-            <a:endParaRPr lang="en-US" smtClean="0"/>
           </a:p>
           <a:p>
             <a:pPr lvl="1"/>
@@ -778,7 +780,6 @@
               <a:rPr lang="en-US" smtClean="0"/>
               <a:t>Second level</a:t>
             </a:r>
-            <a:endParaRPr lang="en-US" smtClean="0"/>
           </a:p>
           <a:p>
             <a:pPr lvl="2"/>
@@ -786,7 +787,6 @@
               <a:rPr lang="en-US" smtClean="0"/>
               <a:t>Third level</a:t>
             </a:r>
-            <a:endParaRPr lang="en-US" smtClean="0"/>
           </a:p>
           <a:p>
             <a:pPr lvl="3"/>
@@ -794,7 +794,6 @@
               <a:rPr lang="en-US" smtClean="0"/>
               <a:t>Fourth level</a:t>
             </a:r>
-            <a:endParaRPr lang="en-US" smtClean="0"/>
           </a:p>
           <a:p>
             <a:pPr lvl="4"/>
@@ -823,6 +822,8 @@
           <a:p>
             <a:fld id="{5BCAD085-E8A6-8845-BD4E-CB4CCA059FC4}" type="datetimeFigureOut">
               <a:rPr lang="en-US" smtClean="0"/>
+              <a:pPr/>
+              <a:t>19-Jun-25</a:t>
             </a:fld>
             <a:endParaRPr lang="en-US"/>
           </a:p>
@@ -864,12 +865,19 @@
           <a:p>
             <a:fld id="{C1FF6DA9-008F-8B48-92A6-B652298478BF}" type="slidenum">
               <a:rPr lang="en-US" smtClean="0"/>
+              <a:pPr/>
+              <a:t>‹#›</a:t>
             </a:fld>
             <a:endParaRPr lang="en-US"/>
           </a:p>
         </p:txBody>
       </p:sp>
     </p:spTree>
+    <p:extLst>
+      <p:ext uri="{BB962C8B-B14F-4D97-AF65-F5344CB8AC3E}">
+        <p14:creationId xmlns:p14="http://schemas.microsoft.com/office/powerpoint/2010/main" xmlns="" val="2614314258"/>
+      </p:ext>
+    </p:extLst>
   </p:cSld>
   <p:clrMapOvr>
     <a:masterClrMapping/>
@@ -1042,7 +1050,6 @@
               <a:rPr lang="en-US" smtClean="0"/>
               <a:t>Click to edit Master text styles</a:t>
             </a:r>
-            <a:endParaRPr lang="en-US" smtClean="0"/>
           </a:p>
         </p:txBody>
       </p:sp>
@@ -1063,6 +1070,8 @@
           <a:p>
             <a:fld id="{5BCAD085-E8A6-8845-BD4E-CB4CCA059FC4}" type="datetimeFigureOut">
               <a:rPr lang="en-US" smtClean="0"/>
+              <a:pPr/>
+              <a:t>19-Jun-25</a:t>
             </a:fld>
             <a:endParaRPr lang="en-US"/>
           </a:p>
@@ -1104,12 +1113,19 @@
           <a:p>
             <a:fld id="{C1FF6DA9-008F-8B48-92A6-B652298478BF}" type="slidenum">
               <a:rPr lang="en-US" smtClean="0"/>
+              <a:pPr/>
+              <a:t>‹#›</a:t>
             </a:fld>
             <a:endParaRPr lang="en-US"/>
           </a:p>
         </p:txBody>
       </p:sp>
     </p:spTree>
+    <p:extLst>
+      <p:ext uri="{BB962C8B-B14F-4D97-AF65-F5344CB8AC3E}">
+        <p14:creationId xmlns:p14="http://schemas.microsoft.com/office/powerpoint/2010/main" xmlns="" val="960648375"/>
+      </p:ext>
+    </p:extLst>
   </p:cSld>
   <p:clrMapOvr>
     <a:masterClrMapping/>
@@ -1210,7 +1226,6 @@
               <a:rPr lang="en-US" smtClean="0"/>
               <a:t>Click to edit Master text styles</a:t>
             </a:r>
-            <a:endParaRPr lang="en-US" smtClean="0"/>
           </a:p>
           <a:p>
             <a:pPr lvl="1"/>
@@ -1218,7 +1233,6 @@
               <a:rPr lang="en-US" smtClean="0"/>
               <a:t>Second level</a:t>
             </a:r>
-            <a:endParaRPr lang="en-US" smtClean="0"/>
           </a:p>
           <a:p>
             <a:pPr lvl="2"/>
@@ -1226,7 +1240,6 @@
               <a:rPr lang="en-US" smtClean="0"/>
               <a:t>Third level</a:t>
             </a:r>
-            <a:endParaRPr lang="en-US" smtClean="0"/>
           </a:p>
           <a:p>
             <a:pPr lvl="3"/>
@@ -1234,7 +1247,6 @@
               <a:rPr lang="en-US" smtClean="0"/>
               <a:t>Fourth level</a:t>
             </a:r>
-            <a:endParaRPr lang="en-US" smtClean="0"/>
           </a:p>
           <a:p>
             <a:pPr lvl="4"/>
@@ -1299,7 +1311,6 @@
               <a:rPr lang="en-US" smtClean="0"/>
               <a:t>Click to edit Master text styles</a:t>
             </a:r>
-            <a:endParaRPr lang="en-US" smtClean="0"/>
           </a:p>
           <a:p>
             <a:pPr lvl="1"/>
@@ -1307,7 +1318,6 @@
               <a:rPr lang="en-US" smtClean="0"/>
               <a:t>Second level</a:t>
             </a:r>
-            <a:endParaRPr lang="en-US" smtClean="0"/>
           </a:p>
           <a:p>
             <a:pPr lvl="2"/>
@@ -1315,7 +1325,6 @@
               <a:rPr lang="en-US" smtClean="0"/>
               <a:t>Third level</a:t>
             </a:r>
-            <a:endParaRPr lang="en-US" smtClean="0"/>
           </a:p>
           <a:p>
             <a:pPr lvl="3"/>
@@ -1323,7 +1332,6 @@
               <a:rPr lang="en-US" smtClean="0"/>
               <a:t>Fourth level</a:t>
             </a:r>
-            <a:endParaRPr lang="en-US" smtClean="0"/>
           </a:p>
           <a:p>
             <a:pPr lvl="4"/>
@@ -1352,6 +1360,8 @@
           <a:p>
             <a:fld id="{5BCAD085-E8A6-8845-BD4E-CB4CCA059FC4}" type="datetimeFigureOut">
               <a:rPr lang="en-US" smtClean="0"/>
+              <a:pPr/>
+              <a:t>19-Jun-25</a:t>
             </a:fld>
             <a:endParaRPr lang="en-US"/>
           </a:p>
@@ -1393,12 +1403,19 @@
           <a:p>
             <a:fld id="{C1FF6DA9-008F-8B48-92A6-B652298478BF}" type="slidenum">
               <a:rPr lang="en-US" smtClean="0"/>
+              <a:pPr/>
+              <a:t>‹#›</a:t>
             </a:fld>
             <a:endParaRPr lang="en-US"/>
           </a:p>
         </p:txBody>
       </p:sp>
     </p:spTree>
+    <p:extLst>
+      <p:ext uri="{BB962C8B-B14F-4D97-AF65-F5344CB8AC3E}">
+        <p14:creationId xmlns:p14="http://schemas.microsoft.com/office/powerpoint/2010/main" xmlns="" val="2782244947"/>
+      </p:ext>
+    </p:extLst>
   </p:cSld>
   <p:clrMapOvr>
     <a:masterClrMapping/>
@@ -1512,7 +1529,6 @@
               <a:rPr lang="en-US" smtClean="0"/>
               <a:t>Click to edit Master text styles</a:t>
             </a:r>
-            <a:endParaRPr lang="en-US" smtClean="0"/>
           </a:p>
         </p:txBody>
       </p:sp>
@@ -1569,7 +1585,6 @@
               <a:rPr lang="en-US" smtClean="0"/>
               <a:t>Click to edit Master text styles</a:t>
             </a:r>
-            <a:endParaRPr lang="en-US" smtClean="0"/>
           </a:p>
           <a:p>
             <a:pPr lvl="1"/>
@@ -1577,7 +1592,6 @@
               <a:rPr lang="en-US" smtClean="0"/>
               <a:t>Second level</a:t>
             </a:r>
-            <a:endParaRPr lang="en-US" smtClean="0"/>
           </a:p>
           <a:p>
             <a:pPr lvl="2"/>
@@ -1585,7 +1599,6 @@
               <a:rPr lang="en-US" smtClean="0"/>
               <a:t>Third level</a:t>
             </a:r>
-            <a:endParaRPr lang="en-US" smtClean="0"/>
           </a:p>
           <a:p>
             <a:pPr lvl="3"/>
@@ -1593,7 +1606,6 @@
               <a:rPr lang="en-US" smtClean="0"/>
               <a:t>Fourth level</a:t>
             </a:r>
-            <a:endParaRPr lang="en-US" smtClean="0"/>
           </a:p>
           <a:p>
             <a:pPr lvl="4"/>
@@ -1667,7 +1679,6 @@
               <a:rPr lang="en-US" smtClean="0"/>
               <a:t>Click to edit Master text styles</a:t>
             </a:r>
-            <a:endParaRPr lang="en-US" smtClean="0"/>
           </a:p>
         </p:txBody>
       </p:sp>
@@ -1724,7 +1735,6 @@
               <a:rPr lang="en-US" smtClean="0"/>
               <a:t>Click to edit Master text styles</a:t>
             </a:r>
-            <a:endParaRPr lang="en-US" smtClean="0"/>
           </a:p>
           <a:p>
             <a:pPr lvl="1"/>
@@ -1732,7 +1742,6 @@
               <a:rPr lang="en-US" smtClean="0"/>
               <a:t>Second level</a:t>
             </a:r>
-            <a:endParaRPr lang="en-US" smtClean="0"/>
           </a:p>
           <a:p>
             <a:pPr lvl="2"/>
@@ -1740,7 +1749,6 @@
               <a:rPr lang="en-US" smtClean="0"/>
               <a:t>Third level</a:t>
             </a:r>
-            <a:endParaRPr lang="en-US" smtClean="0"/>
           </a:p>
           <a:p>
             <a:pPr lvl="3"/>
@@ -1748,7 +1756,6 @@
               <a:rPr lang="en-US" smtClean="0"/>
               <a:t>Fourth level</a:t>
             </a:r>
-            <a:endParaRPr lang="en-US" smtClean="0"/>
           </a:p>
           <a:p>
             <a:pPr lvl="4"/>
@@ -1777,6 +1784,8 @@
           <a:p>
             <a:fld id="{5BCAD085-E8A6-8845-BD4E-CB4CCA059FC4}" type="datetimeFigureOut">
               <a:rPr lang="en-US" smtClean="0"/>
+              <a:pPr/>
+              <a:t>19-Jun-25</a:t>
             </a:fld>
             <a:endParaRPr lang="en-US"/>
           </a:p>
@@ -1818,12 +1827,19 @@
           <a:p>
             <a:fld id="{C1FF6DA9-008F-8B48-92A6-B652298478BF}" type="slidenum">
               <a:rPr lang="en-US" smtClean="0"/>
+              <a:pPr/>
+              <a:t>‹#›</a:t>
             </a:fld>
             <a:endParaRPr lang="en-US"/>
           </a:p>
         </p:txBody>
       </p:sp>
     </p:spTree>
+    <p:extLst>
+      <p:ext uri="{BB962C8B-B14F-4D97-AF65-F5344CB8AC3E}">
+        <p14:creationId xmlns:p14="http://schemas.microsoft.com/office/powerpoint/2010/main" xmlns="" val="990158736"/>
+      </p:ext>
+    </p:extLst>
   </p:cSld>
   <p:clrMapOvr>
     <a:masterClrMapping/>
@@ -1888,6 +1904,8 @@
           <a:p>
             <a:fld id="{5BCAD085-E8A6-8845-BD4E-CB4CCA059FC4}" type="datetimeFigureOut">
               <a:rPr lang="en-US" smtClean="0"/>
+              <a:pPr/>
+              <a:t>19-Jun-25</a:t>
             </a:fld>
             <a:endParaRPr lang="en-US"/>
           </a:p>
@@ -1929,12 +1947,19 @@
           <a:p>
             <a:fld id="{C1FF6DA9-008F-8B48-92A6-B652298478BF}" type="slidenum">
               <a:rPr lang="en-US" smtClean="0"/>
+              <a:pPr/>
+              <a:t>‹#›</a:t>
             </a:fld>
             <a:endParaRPr lang="en-US"/>
           </a:p>
         </p:txBody>
       </p:sp>
     </p:spTree>
+    <p:extLst>
+      <p:ext uri="{BB962C8B-B14F-4D97-AF65-F5344CB8AC3E}">
+        <p14:creationId xmlns:p14="http://schemas.microsoft.com/office/powerpoint/2010/main" xmlns="" val="727027711"/>
+      </p:ext>
+    </p:extLst>
   </p:cSld>
   <p:clrMapOvr>
     <a:masterClrMapping/>
@@ -1976,6 +2001,8 @@
           <a:p>
             <a:fld id="{5BCAD085-E8A6-8845-BD4E-CB4CCA059FC4}" type="datetimeFigureOut">
               <a:rPr lang="en-US" smtClean="0"/>
+              <a:pPr/>
+              <a:t>19-Jun-25</a:t>
             </a:fld>
             <a:endParaRPr lang="en-US"/>
           </a:p>
@@ -2017,12 +2044,19 @@
           <a:p>
             <a:fld id="{C1FF6DA9-008F-8B48-92A6-B652298478BF}" type="slidenum">
               <a:rPr lang="en-US" smtClean="0"/>
+              <a:pPr/>
+              <a:t>‹#›</a:t>
             </a:fld>
             <a:endParaRPr lang="en-US"/>
           </a:p>
         </p:txBody>
       </p:sp>
     </p:spTree>
+    <p:extLst>
+      <p:ext uri="{BB962C8B-B14F-4D97-AF65-F5344CB8AC3E}">
+        <p14:creationId xmlns:p14="http://schemas.microsoft.com/office/powerpoint/2010/main" xmlns="" val="1212999818"/>
+      </p:ext>
+    </p:extLst>
   </p:cSld>
   <p:clrMapOvr>
     <a:masterClrMapping/>
@@ -2132,7 +2166,6 @@
               <a:rPr lang="en-US" smtClean="0"/>
               <a:t>Click to edit Master text styles</a:t>
             </a:r>
-            <a:endParaRPr lang="en-US" smtClean="0"/>
           </a:p>
           <a:p>
             <a:pPr lvl="1"/>
@@ -2140,7 +2173,6 @@
               <a:rPr lang="en-US" smtClean="0"/>
               <a:t>Second level</a:t>
             </a:r>
-            <a:endParaRPr lang="en-US" smtClean="0"/>
           </a:p>
           <a:p>
             <a:pPr lvl="2"/>
@@ -2148,7 +2180,6 @@
               <a:rPr lang="en-US" smtClean="0"/>
               <a:t>Third level</a:t>
             </a:r>
-            <a:endParaRPr lang="en-US" smtClean="0"/>
           </a:p>
           <a:p>
             <a:pPr lvl="3"/>
@@ -2156,7 +2187,6 @@
               <a:rPr lang="en-US" smtClean="0"/>
               <a:t>Fourth level</a:t>
             </a:r>
-            <a:endParaRPr lang="en-US" smtClean="0"/>
           </a:p>
           <a:p>
             <a:pPr lvl="4"/>
@@ -2230,7 +2260,6 @@
               <a:rPr lang="en-US" smtClean="0"/>
               <a:t>Click to edit Master text styles</a:t>
             </a:r>
-            <a:endParaRPr lang="en-US" smtClean="0"/>
           </a:p>
         </p:txBody>
       </p:sp>
@@ -2251,6 +2280,8 @@
           <a:p>
             <a:fld id="{5BCAD085-E8A6-8845-BD4E-CB4CCA059FC4}" type="datetimeFigureOut">
               <a:rPr lang="en-US" smtClean="0"/>
+              <a:pPr/>
+              <a:t>19-Jun-25</a:t>
             </a:fld>
             <a:endParaRPr lang="en-US"/>
           </a:p>
@@ -2292,12 +2323,19 @@
           <a:p>
             <a:fld id="{C1FF6DA9-008F-8B48-92A6-B652298478BF}" type="slidenum">
               <a:rPr lang="en-US" smtClean="0"/>
+              <a:pPr/>
+              <a:t>‹#›</a:t>
             </a:fld>
             <a:endParaRPr lang="en-US"/>
           </a:p>
         </p:txBody>
       </p:sp>
     </p:spTree>
+    <p:extLst>
+      <p:ext uri="{BB962C8B-B14F-4D97-AF65-F5344CB8AC3E}">
+        <p14:creationId xmlns:p14="http://schemas.microsoft.com/office/powerpoint/2010/main" xmlns="" val="1840726560"/>
+      </p:ext>
+    </p:extLst>
   </p:cSld>
   <p:clrMapOvr>
     <a:masterClrMapping/>
@@ -2477,7 +2515,6 @@
               <a:rPr lang="en-US" smtClean="0"/>
               <a:t>Click to edit Master text styles</a:t>
             </a:r>
-            <a:endParaRPr lang="en-US" smtClean="0"/>
           </a:p>
         </p:txBody>
       </p:sp>
@@ -2498,6 +2535,8 @@
           <a:p>
             <a:fld id="{5BCAD085-E8A6-8845-BD4E-CB4CCA059FC4}" type="datetimeFigureOut">
               <a:rPr lang="en-US" smtClean="0"/>
+              <a:pPr/>
+              <a:t>19-Jun-25</a:t>
             </a:fld>
             <a:endParaRPr lang="en-US"/>
           </a:p>
@@ -2539,12 +2578,19 @@
           <a:p>
             <a:fld id="{C1FF6DA9-008F-8B48-92A6-B652298478BF}" type="slidenum">
               <a:rPr lang="en-US" smtClean="0"/>
+              <a:pPr/>
+              <a:t>‹#›</a:t>
             </a:fld>
             <a:endParaRPr lang="en-US"/>
           </a:p>
         </p:txBody>
       </p:sp>
     </p:spTree>
+    <p:extLst>
+      <p:ext uri="{BB962C8B-B14F-4D97-AF65-F5344CB8AC3E}">
+        <p14:creationId xmlns:p14="http://schemas.microsoft.com/office/powerpoint/2010/main" xmlns="" val="3889236939"/>
+      </p:ext>
+    </p:extLst>
   </p:cSld>
   <p:clrMapOvr>
     <a:masterClrMapping/>
@@ -2637,7 +2683,6 @@
               <a:rPr lang="en-US" smtClean="0"/>
               <a:t>Click to edit Master text styles</a:t>
             </a:r>
-            <a:endParaRPr lang="en-US" smtClean="0"/>
           </a:p>
           <a:p>
             <a:pPr lvl="1"/>
@@ -2645,7 +2690,6 @@
               <a:rPr lang="en-US" smtClean="0"/>
               <a:t>Second level</a:t>
             </a:r>
-            <a:endParaRPr lang="en-US" smtClean="0"/>
           </a:p>
           <a:p>
             <a:pPr lvl="2"/>
@@ -2653,7 +2697,6 @@
               <a:rPr lang="en-US" smtClean="0"/>
               <a:t>Third level</a:t>
             </a:r>
-            <a:endParaRPr lang="en-US" smtClean="0"/>
           </a:p>
           <a:p>
             <a:pPr lvl="3"/>
@@ -2661,7 +2704,6 @@
               <a:rPr lang="en-US" smtClean="0"/>
               <a:t>Fourth level</a:t>
             </a:r>
-            <a:endParaRPr lang="en-US" smtClean="0"/>
           </a:p>
           <a:p>
             <a:pPr lvl="4"/>
@@ -2708,6 +2750,8 @@
           <a:p>
             <a:fld id="{5BCAD085-E8A6-8845-BD4E-CB4CCA059FC4}" type="datetimeFigureOut">
               <a:rPr lang="en-US" smtClean="0"/>
+              <a:pPr/>
+              <a:t>19-Jun-25</a:t>
             </a:fld>
             <a:endParaRPr lang="en-US"/>
           </a:p>
@@ -2785,12 +2829,19 @@
           <a:p>
             <a:fld id="{C1FF6DA9-008F-8B48-92A6-B652298478BF}" type="slidenum">
               <a:rPr lang="en-US" smtClean="0"/>
+              <a:pPr/>
+              <a:t>‹#›</a:t>
             </a:fld>
             <a:endParaRPr lang="en-US"/>
           </a:p>
         </p:txBody>
       </p:sp>
     </p:spTree>
+    <p:extLst>
+      <p:ext uri="{BB962C8B-B14F-4D97-AF65-F5344CB8AC3E}">
+        <p14:creationId xmlns:p14="http://schemas.microsoft.com/office/powerpoint/2010/main" xmlns="" val="2209977519"/>
+      </p:ext>
+    </p:extLst>
   </p:cSld>
   <p:clrMap bg1="lt1" tx1="dk1" bg2="lt2" tx2="dk2" accent1="accent1" accent2="accent2" accent3="accent3" accent4="accent4" accent5="accent5" accent6="accent6" hlink="hlink" folHlink="folHlink"/>
   <p:sldLayoutIdLst>
@@ -2828,7 +2879,7 @@
         <a:spcBef>
           <a:spcPct val="20000"/>
         </a:spcBef>
-        <a:buFont typeface="Arial" panose="020B0604020202020204"/>
+        <a:buFont typeface="Arial"/>
         <a:buChar char="•"/>
         <a:defRPr sz="3200" kern="1200">
           <a:solidFill>
@@ -2843,7 +2894,7 @@
         <a:spcBef>
           <a:spcPct val="20000"/>
         </a:spcBef>
-        <a:buFont typeface="Arial" panose="020B0604020202020204"/>
+        <a:buFont typeface="Arial"/>
         <a:buChar char="–"/>
         <a:defRPr sz="2800" kern="1200">
           <a:solidFill>
@@ -2858,7 +2909,7 @@
         <a:spcBef>
           <a:spcPct val="20000"/>
         </a:spcBef>
-        <a:buFont typeface="Arial" panose="020B0604020202020204"/>
+        <a:buFont typeface="Arial"/>
         <a:buChar char="•"/>
         <a:defRPr sz="2400" kern="1200">
           <a:solidFill>
@@ -2873,7 +2924,7 @@
         <a:spcBef>
           <a:spcPct val="20000"/>
         </a:spcBef>
-        <a:buFont typeface="Arial" panose="020B0604020202020204"/>
+        <a:buFont typeface="Arial"/>
         <a:buChar char="–"/>
         <a:defRPr sz="2000" kern="1200">
           <a:solidFill>
@@ -2888,7 +2939,7 @@
         <a:spcBef>
           <a:spcPct val="20000"/>
         </a:spcBef>
-        <a:buFont typeface="Arial" panose="020B0604020202020204"/>
+        <a:buFont typeface="Arial"/>
         <a:buChar char="»"/>
         <a:defRPr sz="2000" kern="1200">
           <a:solidFill>
@@ -2903,7 +2954,7 @@
         <a:spcBef>
           <a:spcPct val="20000"/>
         </a:spcBef>
-        <a:buFont typeface="Arial" panose="020B0604020202020204"/>
+        <a:buFont typeface="Arial"/>
         <a:buChar char="•"/>
         <a:defRPr sz="2000" kern="1200">
           <a:solidFill>
@@ -2918,7 +2969,7 @@
         <a:spcBef>
           <a:spcPct val="20000"/>
         </a:spcBef>
-        <a:buFont typeface="Arial" panose="020B0604020202020204"/>
+        <a:buFont typeface="Arial"/>
         <a:buChar char="•"/>
         <a:defRPr sz="2000" kern="1200">
           <a:solidFill>
@@ -2933,7 +2984,7 @@
         <a:spcBef>
           <a:spcPct val="20000"/>
         </a:spcBef>
-        <a:buFont typeface="Arial" panose="020B0604020202020204"/>
+        <a:buFont typeface="Arial"/>
         <a:buChar char="•"/>
         <a:defRPr sz="2000" kern="1200">
           <a:solidFill>
@@ -2948,7 +2999,7 @@
         <a:spcBef>
           <a:spcPct val="20000"/>
         </a:spcBef>
-        <a:buFont typeface="Arial" panose="020B0604020202020204"/>
+        <a:buFont typeface="Arial"/>
         <a:buChar char="•"/>
         <a:defRPr sz="2000" kern="1200">
           <a:solidFill>
@@ -3187,7 +3238,9 @@
               <a:t>Question: Is there a relationship between smoking and lung disease?</a:t>
             </a:r>
           </a:p>
-          <a:p/>
+          <a:p>
+            <a:endParaRPr/>
+          </a:p>
           <a:p>
             <a:r>
               <a:t>Observed Table:</a:t>
@@ -3203,7 +3256,9 @@
               <a:t>• Non-Smoker - Disease: 20 | No Disease: 80</a:t>
             </a:r>
           </a:p>
-          <a:p/>
+          <a:p>
+            <a:endParaRPr/>
+          </a:p>
           <a:p>
             <a:r>
               <a:t>Test: Association between smoking status and lung disease.</a:t>
@@ -3280,21 +3335,18 @@
               <a:rPr sz="2400"/>
               <a:t>Observed Table:</a:t>
             </a:r>
-            <a:endParaRPr sz="2400"/>
           </a:p>
           <a:p>
             <a:r>
               <a:rPr sz="2400"/>
               <a:t>Smoker: [Disease: 40, No Disease: 60]</a:t>
             </a:r>
-            <a:endParaRPr sz="2400"/>
           </a:p>
           <a:p>
             <a:r>
               <a:rPr sz="2400"/>
               <a:t>Non-Smoker: [Disease: 20, No Disease: 80]</a:t>
             </a:r>
-            <a:endParaRPr sz="2400"/>
           </a:p>
           <a:p>
             <a:endParaRPr sz="2400"/>
@@ -3304,21 +3356,18 @@
               <a:rPr sz="2400"/>
               <a:t>Expected values:</a:t>
             </a:r>
-            <a:endParaRPr sz="2400"/>
           </a:p>
           <a:p>
             <a:r>
               <a:rPr sz="2400"/>
               <a:t>• Total = 200, Disease = 60, No Disease = 140</a:t>
             </a:r>
-            <a:endParaRPr sz="2400"/>
           </a:p>
           <a:p>
             <a:r>
               <a:rPr sz="2400"/>
               <a:t>• Smoker Expected: [30, 70], Non-Smoker Expected: [30, 70]</a:t>
             </a:r>
-            <a:endParaRPr sz="2400"/>
           </a:p>
           <a:p>
             <a:endParaRPr sz="2400"/>
@@ -3328,14 +3377,12 @@
               <a:rPr sz="2400"/>
               <a:t>χ² = (40-30)²/30 + (60-70)²/70 + (20-30)²/30 + (80-70)²/70</a:t>
             </a:r>
-            <a:endParaRPr sz="2400"/>
           </a:p>
           <a:p>
             <a:r>
               <a:rPr sz="2400"/>
               <a:t>= 3.33 + 1.43 + 3.33 + 1.43 = 9.52</a:t>
             </a:r>
-            <a:endParaRPr sz="2400"/>
           </a:p>
           <a:p>
             <a:endParaRPr sz="2400"/>
@@ -3345,7 +3392,6 @@
               <a:rPr sz="2400"/>
               <a:t>df = 1 → Critical value (0.05) = 3.84 → Reject H₀</a:t>
             </a:r>
-            <a:endParaRPr sz="2400"/>
           </a:p>
         </p:txBody>
       </p:sp>
@@ -3418,7 +3464,9 @@
               <a:t>Question: Does education level affect voting behavior?</a:t>
             </a:r>
           </a:p>
-          <a:p/>
+          <a:p>
+            <a:endParaRPr/>
+          </a:p>
           <a:p>
             <a:r>
               <a:t>Observed Table:</a:t>
@@ -3439,7 +3487,9 @@
               <a:t>• Higher Education - Voted: 70 | Didn’t Vote: 30</a:t>
             </a:r>
           </a:p>
-          <a:p/>
+          <a:p>
+            <a:endParaRPr/>
+          </a:p>
           <a:p>
             <a:r>
               <a:t>Test: Association between education and voting.</a:t>
@@ -3521,7 +3571,9 @@
               <a:t>Primary: [25, 75], Secondary: [40, 60], Higher: [70, 30]</a:t>
             </a:r>
           </a:p>
-          <a:p/>
+          <a:p>
+            <a:endParaRPr/>
+          </a:p>
           <a:p>
             <a:r>
               <a:t>Expected values (computed from row/column totals)</a:t>
@@ -3537,7 +3589,9 @@
               <a:t>Calculate expected for each cell, apply formula</a:t>
             </a:r>
           </a:p>
-          <a:p/>
+          <a:p>
+            <a:endParaRPr/>
+          </a:p>
           <a:p>
             <a:r>
               <a:t>Assume χ² ≈ 35.6, df = (3-1)(2-1) = 2 → Critical (0.05) = 5.99</a:t>
@@ -3619,7 +3673,9 @@
               <a:t>Question: Does ad type affect product purchase?</a:t>
             </a:r>
           </a:p>
-          <a:p/>
+          <a:p>
+            <a:endParaRPr/>
+          </a:p>
           <a:p>
             <a:r>
               <a:t>Observed Table:</a:t>
@@ -3640,7 +3696,9 @@
               <a:t>• Newspaper Ad - Bought: 30 | Didn’t Buy: 70</a:t>
             </a:r>
           </a:p>
-          <a:p/>
+          <a:p>
+            <a:endParaRPr/>
+          </a:p>
           <a:p>
             <a:r>
               <a:t>Test: Association between ad type and customer buying behavior.</a:t>
@@ -3722,7 +3780,9 @@
               <a:t>TV: [50, 50], FB: [60, 40], Newspaper: [30, 70]</a:t>
             </a:r>
           </a:p>
-          <a:p/>
+          <a:p>
+            <a:endParaRPr/>
+          </a:p>
           <a:p>
             <a:r>
               <a:t>Expected calculated from totals</a:t>
@@ -3733,7 +3793,9 @@
               <a:t>χ² = Σ((O-E)²/E) for all 6 cells</a:t>
             </a:r>
           </a:p>
-          <a:p/>
+          <a:p>
+            <a:endParaRPr/>
+          </a:p>
           <a:p>
             <a:r>
               <a:t>Assume χ² ≈ 16.2, df = (3-1)(2-1) = 2 → Critical (0.05) = 5.99</a:t>
@@ -3815,7 +3877,9 @@
               <a:t>Question: Do men and women prefer different platforms?</a:t>
             </a:r>
           </a:p>
-          <a:p/>
+          <a:p>
+            <a:endParaRPr/>
+          </a:p>
           <a:p>
             <a:r>
               <a:t>Observed Table:</a:t>
@@ -3831,7 +3895,9 @@
               <a:t>• Female - Facebook: 50 | Instagram: 30 | YouTube: 20</a:t>
             </a:r>
           </a:p>
-          <a:p/>
+          <a:p>
+            <a:endParaRPr/>
+          </a:p>
           <a:p>
             <a:r>
               <a:t>Test: Association between gender and platform preference.</a:t>
@@ -3913,7 +3979,9 @@
               <a:t>Male: [30, 10, 40], Female: [50, 30, 20]</a:t>
             </a:r>
           </a:p>
-          <a:p/>
+          <a:p>
+            <a:endParaRPr/>
+          </a:p>
           <a:p>
             <a:r>
               <a:t>Expected calculated using row/column totals</a:t>
@@ -3924,21 +3992,12 @@
               <a:t>χ² = Σ((O-E)²/E) over 6 cells</a:t>
             </a:r>
           </a:p>
-          <a:p/>
-          <a:p>
-            <a:r>
-              <a:t>Assume </a:t>
-            </a:r>
-            <a:r>
-              <a:rPr>
-                <a:highlight>
-                  <a:srgbClr val="FFFF00"/>
-                </a:highlight>
-              </a:rPr>
-              <a:t>χ² ≈ 22.5</a:t>
-            </a:r>
-            <a:r>
-              <a:t>, df = (2-1)(3-1) = 2 → Critical (0.05) = 5.99</a:t>
+          <a:p>
+            <a:endParaRPr/>
+          </a:p>
+          <a:p>
+            <a:r>
+              <a:t>Assume χ² ≈ 22.5, df = (2-1)(3-1) = 2 → Critical (0.05) = 5.99</a:t>
             </a:r>
           </a:p>
           <a:p>
@@ -4272,10 +4331,6 @@
       </a:style>
     </a:lnDef>
   </a:objectDefaults>
-  <a:extLst>
-    <a:ext uri="{05A4C25C-085E-4340-85A3-A5531E510DB2}">
-      <thm15:themeFamily xmlns:thm15="http://schemas.microsoft.com/office/thememl/2012/main" name="Office Theme" id="{62F939B6-93AF-4DB8-9C6B-D6C7DFDC589F}" vid="{4A3C46E8-61CC-4603-A589-7422A47A8E4A}"/>
-    </a:ext>
-  </a:extLst>
+  <a:extraClrSchemeLst/>
 </a:theme>
 </file>